--- a/catalog/samples/executive_summary.pptx
+++ b/catalog/samples/executive_summary.pptx
@@ -972,7 +972,7 @@
           </a:p>
           <a:p>
             <a:r>
-              <a:t>  "template_sha256": "6ae6491b456828ac99c34880eced6632ebd37215b5ec361da48964c5aa255e6b"</a:t>
+              <a:t>  "template_sha256": "cb4c605be6d9e09596e5e91804f2fc6e6de4754c5931749f97e4d066faed1d6b"</a:t>
             </a:r>
           </a:p>
           <a:p>
